--- a/10 класс/urok2/Практика_Python_18задач.pptx
+++ b/10 класс/urok2/Практика_Python_18задач.pptx
@@ -13414,7 +13414,7 @@
               <a:buNone/>
             </a:pPr>
             <a:r>
-              <a:rPr lang="en-US" sz="2000" dirty="0">
+              <a:rPr lang="en-US" sz="2400" dirty="0">
                 <a:solidFill>
                   <a:srgbClr val="FFFFFF"/>
                 </a:solidFill>
@@ -13424,7 +13424,7 @@
               </a:rPr>
               <a:t>Выведи три строки: фамилию и имя, класс, школу.</a:t>
             </a:r>
-            <a:endParaRPr lang="en-US" sz="2000" dirty="0"/>
+            <a:endParaRPr lang="en-US" sz="2400" dirty="0"/>
           </a:p>
         </p:txBody>
       </p:sp>
@@ -13726,7 +13726,7 @@
               <a:buNone/>
             </a:pPr>
             <a:r>
-              <a:rPr lang="en-US" sz="2000" dirty="0">
+              <a:rPr lang="en-US" sz="2400" dirty="0">
                 <a:solidFill>
                   <a:srgbClr val="FFFFFF"/>
                 </a:solidFill>
@@ -13734,9 +13734,31 @@
                 <a:ea typeface="Calibri" pitchFamily="34" charset="-122"/>
                 <a:cs typeface="Calibri" pitchFamily="34" charset="-120"/>
               </a:rPr>
-              <a:t>Объяви три переменные и выведи каждую с подписью.</a:t>
-            </a:r>
-            <a:endParaRPr lang="en-US" sz="2000" dirty="0"/>
+              <a:t>Объяви три переменные и </a:t>
+            </a:r>
+            <a:r>
+              <a:rPr lang="en-US" sz="2400" dirty="0" err="1">
+                <a:solidFill>
+                  <a:srgbClr val="FFFFFF"/>
+                </a:solidFill>
+                <a:latin typeface="Calibri" pitchFamily="34" charset="0"/>
+                <a:ea typeface="Calibri" pitchFamily="34" charset="-122"/>
+                <a:cs typeface="Calibri" pitchFamily="34" charset="-120"/>
+              </a:rPr>
+              <a:t>выведи</a:t>
+            </a:r>
+            <a:r>
+              <a:rPr lang="en-US" sz="2400" dirty="0">
+                <a:solidFill>
+                  <a:srgbClr val="FFFFFF"/>
+                </a:solidFill>
+                <a:latin typeface="Calibri" pitchFamily="34" charset="0"/>
+                <a:ea typeface="Calibri" pitchFamily="34" charset="-122"/>
+                <a:cs typeface="Calibri" pitchFamily="34" charset="-120"/>
+              </a:rPr>
+              <a:t> каждую с подписью.</a:t>
+            </a:r>
+            <a:endParaRPr lang="en-US" sz="2400" dirty="0"/>
           </a:p>
         </p:txBody>
       </p:sp>
@@ -14146,7 +14168,7 @@
               <a:buNone/>
             </a:pPr>
             <a:r>
-              <a:rPr lang="en-US" sz="2000" dirty="0">
+              <a:rPr lang="en-US" sz="2400" dirty="0">
                 <a:solidFill>
                   <a:srgbClr val="FFFFFF"/>
                 </a:solidFill>
@@ -14154,9 +14176,31 @@
                 <a:ea typeface="Calibri" pitchFamily="34" charset="-122"/>
                 <a:cs typeface="Calibri" pitchFamily="34" charset="-120"/>
               </a:rPr>
-              <a:t>Выведи текст и число в одной строке.</a:t>
-            </a:r>
-            <a:endParaRPr lang="en-US" sz="2000" dirty="0"/>
+              <a:t>Выведи текст и число в </a:t>
+            </a:r>
+            <a:r>
+              <a:rPr lang="en-US" sz="2400" dirty="0" err="1">
+                <a:solidFill>
+                  <a:srgbClr val="FFFFFF"/>
+                </a:solidFill>
+                <a:latin typeface="Calibri" pitchFamily="34" charset="0"/>
+                <a:ea typeface="Calibri" pitchFamily="34" charset="-122"/>
+                <a:cs typeface="Calibri" pitchFamily="34" charset="-120"/>
+              </a:rPr>
+              <a:t>одной</a:t>
+            </a:r>
+            <a:r>
+              <a:rPr lang="en-US" sz="2400" dirty="0">
+                <a:solidFill>
+                  <a:srgbClr val="FFFFFF"/>
+                </a:solidFill>
+                <a:latin typeface="Calibri" pitchFamily="34" charset="0"/>
+                <a:ea typeface="Calibri" pitchFamily="34" charset="-122"/>
+                <a:cs typeface="Calibri" pitchFamily="34" charset="-120"/>
+              </a:rPr>
+              <a:t> строке.</a:t>
+            </a:r>
+            <a:endParaRPr lang="en-US" sz="2400" dirty="0"/>
           </a:p>
         </p:txBody>
       </p:sp>
@@ -18972,7 +19016,7 @@
               <a:buNone/>
             </a:pPr>
             <a:r>
-              <a:rPr lang="en-US" sz="1700" dirty="0">
+              <a:rPr lang="en-US" sz="2400" dirty="0">
                 <a:solidFill>
                   <a:srgbClr val="FFFFFF"/>
                 </a:solidFill>
@@ -18982,7 +19026,7 @@
               </a:rPr>
               <a:t>Переведи минуты в часы и оставшиеся минуты.</a:t>
             </a:r>
-            <a:endParaRPr lang="en-US" sz="1700" dirty="0"/>
+            <a:endParaRPr lang="en-US" sz="2400" dirty="0"/>
           </a:p>
         </p:txBody>
       </p:sp>
@@ -19080,9 +19124,9 @@
               <a:buNone/>
             </a:pPr>
             <a:r>
-              <a:rPr lang="en-US" dirty="0">
-                <a:solidFill>
-                  <a:srgbClr val="4FD1E0"/>
+              <a:rPr lang="en-US" sz="2000" dirty="0">
+                <a:solidFill>
+                  <a:schemeClr val="bg1"/>
                 </a:solidFill>
                 <a:latin typeface="Consolas" pitchFamily="34" charset="0"/>
                 <a:ea typeface="Consolas" pitchFamily="34" charset="-122"/>
@@ -19090,7 +19134,11 @@
               </a:rPr>
               <a:t>minuty = 100</a:t>
             </a:r>
-            <a:endParaRPr lang="en-US" dirty="0"/>
+            <a:endParaRPr lang="en-US" sz="2000" dirty="0">
+              <a:solidFill>
+                <a:schemeClr val="bg1"/>
+              </a:solidFill>
+            </a:endParaRPr>
           </a:p>
         </p:txBody>
       </p:sp>
@@ -19190,7 +19238,7 @@
             <a:r>
               <a:rPr lang="en-US" sz="2000" dirty="0">
                 <a:solidFill>
-                  <a:srgbClr val="4FD1E0"/>
+                  <a:schemeClr val="bg1"/>
                 </a:solidFill>
                 <a:latin typeface="Consolas" pitchFamily="34" charset="0"/>
                 <a:ea typeface="Consolas" pitchFamily="34" charset="-122"/>
@@ -19198,7 +19246,11 @@
               </a:rPr>
               <a:t>Часы: 1</a:t>
             </a:r>
-            <a:endParaRPr lang="en-US" sz="2000" dirty="0"/>
+            <a:endParaRPr lang="en-US" sz="2000" dirty="0">
+              <a:solidFill>
+                <a:schemeClr val="bg1"/>
+              </a:solidFill>
+            </a:endParaRPr>
           </a:p>
           <a:p>
             <a:pPr marL="0" indent="0">
@@ -19210,7 +19262,7 @@
             <a:r>
               <a:rPr lang="en-US" sz="2000" dirty="0">
                 <a:solidFill>
-                  <a:srgbClr val="4FD1E0"/>
+                  <a:schemeClr val="bg1"/>
                 </a:solidFill>
                 <a:latin typeface="Consolas" pitchFamily="34" charset="0"/>
                 <a:ea typeface="Consolas" pitchFamily="34" charset="-122"/>
@@ -19218,7 +19270,11 @@
               </a:rPr>
               <a:t>Минуты: 40</a:t>
             </a:r>
-            <a:endParaRPr lang="en-US" sz="2000" dirty="0"/>
+            <a:endParaRPr lang="en-US" sz="2000" dirty="0">
+              <a:solidFill>
+                <a:schemeClr val="bg1"/>
+              </a:solidFill>
+            </a:endParaRPr>
           </a:p>
         </p:txBody>
       </p:sp>
@@ -19372,7 +19428,7 @@
               <a:buNone/>
             </a:pPr>
             <a:r>
-              <a:rPr lang="en-US" sz="1700" dirty="0">
+              <a:rPr lang="en-US" sz="2400" dirty="0">
                 <a:solidFill>
                   <a:srgbClr val="FFFFFF"/>
                 </a:solidFill>
@@ -19382,7 +19438,7 @@
               </a:rPr>
               <a:t>Выведи десятки и единицы двузначного числа.</a:t>
             </a:r>
-            <a:endParaRPr lang="en-US" sz="1700" dirty="0"/>
+            <a:endParaRPr lang="en-US" sz="2400" dirty="0"/>
           </a:p>
         </p:txBody>
       </p:sp>
@@ -19480,9 +19536,9 @@
               <a:buNone/>
             </a:pPr>
             <a:r>
-              <a:rPr lang="en-US" dirty="0">
-                <a:solidFill>
-                  <a:srgbClr val="4FD1E0"/>
+              <a:rPr lang="en-US" sz="2000" dirty="0">
+                <a:solidFill>
+                  <a:schemeClr val="bg1"/>
                 </a:solidFill>
                 <a:latin typeface="Consolas" pitchFamily="34" charset="0"/>
                 <a:ea typeface="Consolas" pitchFamily="34" charset="-122"/>
@@ -19490,7 +19546,11 @@
               </a:rPr>
               <a:t>n = 47</a:t>
             </a:r>
-            <a:endParaRPr lang="en-US" dirty="0"/>
+            <a:endParaRPr lang="en-US" sz="2000" dirty="0">
+              <a:solidFill>
+                <a:schemeClr val="bg1"/>
+              </a:solidFill>
+            </a:endParaRPr>
           </a:p>
         </p:txBody>
       </p:sp>
@@ -19588,9 +19648,9 @@
               <a:buNone/>
             </a:pPr>
             <a:r>
-              <a:rPr lang="en-US" dirty="0">
-                <a:solidFill>
-                  <a:srgbClr val="4FD1E0"/>
+              <a:rPr lang="en-US" sz="2000" dirty="0">
+                <a:solidFill>
+                  <a:schemeClr val="bg1"/>
                 </a:solidFill>
                 <a:latin typeface="Consolas" pitchFamily="34" charset="0"/>
                 <a:ea typeface="Consolas" pitchFamily="34" charset="-122"/>
@@ -19598,7 +19658,11 @@
               </a:rPr>
               <a:t>Десятки: 4</a:t>
             </a:r>
-            <a:endParaRPr lang="en-US" dirty="0"/>
+            <a:endParaRPr lang="en-US" sz="2000" dirty="0">
+              <a:solidFill>
+                <a:schemeClr val="bg1"/>
+              </a:solidFill>
+            </a:endParaRPr>
           </a:p>
           <a:p>
             <a:pPr marL="0" indent="0">
@@ -19608,9 +19672,9 @@
               <a:buNone/>
             </a:pPr>
             <a:r>
-              <a:rPr lang="en-US" dirty="0">
-                <a:solidFill>
-                  <a:srgbClr val="4FD1E0"/>
+              <a:rPr lang="en-US" sz="2000" dirty="0">
+                <a:solidFill>
+                  <a:schemeClr val="bg1"/>
                 </a:solidFill>
                 <a:latin typeface="Consolas" pitchFamily="34" charset="0"/>
                 <a:ea typeface="Consolas" pitchFamily="34" charset="-122"/>
@@ -19618,7 +19682,11 @@
               </a:rPr>
               <a:t>Единицы: 7</a:t>
             </a:r>
-            <a:endParaRPr lang="en-US" dirty="0"/>
+            <a:endParaRPr lang="en-US" sz="2000" dirty="0">
+              <a:solidFill>
+                <a:schemeClr val="bg1"/>
+              </a:solidFill>
+            </a:endParaRPr>
           </a:p>
         </p:txBody>
       </p:sp>
@@ -19772,7 +19840,7 @@
               <a:buNone/>
             </a:pPr>
             <a:r>
-              <a:rPr lang="en-US" sz="1700" dirty="0">
+              <a:rPr lang="en-US" sz="2400" dirty="0">
                 <a:solidFill>
                   <a:srgbClr val="FFFFFF"/>
                 </a:solidFill>
@@ -19782,7 +19850,7 @@
               </a:rPr>
               <a:t>25 учеников делят на группы по 4. Сколько полных групп и сколько осталось?</a:t>
             </a:r>
-            <a:endParaRPr lang="en-US" sz="1700" dirty="0"/>
+            <a:endParaRPr lang="en-US" sz="2400" dirty="0"/>
           </a:p>
         </p:txBody>
       </p:sp>
@@ -19880,9 +19948,9 @@
               <a:buNone/>
             </a:pPr>
             <a:r>
-              <a:rPr lang="en-US" dirty="0">
-                <a:solidFill>
-                  <a:srgbClr val="4FD1E0"/>
+              <a:rPr lang="en-US" sz="2000" dirty="0">
+                <a:solidFill>
+                  <a:schemeClr val="bg1"/>
                 </a:solidFill>
                 <a:latin typeface="Consolas" pitchFamily="34" charset="0"/>
                 <a:ea typeface="Consolas" pitchFamily="34" charset="-122"/>
@@ -19890,7 +19958,11 @@
               </a:rPr>
               <a:t>vsego = 25</a:t>
             </a:r>
-            <a:endParaRPr lang="en-US" dirty="0"/>
+            <a:endParaRPr lang="en-US" sz="2000" dirty="0">
+              <a:solidFill>
+                <a:schemeClr val="bg1"/>
+              </a:solidFill>
+            </a:endParaRPr>
           </a:p>
           <a:p>
             <a:pPr marL="0" indent="0">
@@ -19900,9 +19972,9 @@
               <a:buNone/>
             </a:pPr>
             <a:r>
-              <a:rPr lang="en-US" dirty="0">
-                <a:solidFill>
-                  <a:srgbClr val="4FD1E0"/>
+              <a:rPr lang="en-US" sz="2000" dirty="0">
+                <a:solidFill>
+                  <a:schemeClr val="bg1"/>
                 </a:solidFill>
                 <a:latin typeface="Consolas" pitchFamily="34" charset="0"/>
                 <a:ea typeface="Consolas" pitchFamily="34" charset="-122"/>
@@ -19910,7 +19982,11 @@
               </a:rPr>
               <a:t>v_gruppe = 4</a:t>
             </a:r>
-            <a:endParaRPr lang="en-US" dirty="0"/>
+            <a:endParaRPr lang="en-US" sz="2000" dirty="0">
+              <a:solidFill>
+                <a:schemeClr val="bg1"/>
+              </a:solidFill>
+            </a:endParaRPr>
           </a:p>
         </p:txBody>
       </p:sp>
@@ -20008,9 +20084,9 @@
               <a:buNone/>
             </a:pPr>
             <a:r>
-              <a:rPr lang="en-US" dirty="0">
-                <a:solidFill>
-                  <a:srgbClr val="4FD1E0"/>
+              <a:rPr lang="en-US" sz="2000" dirty="0">
+                <a:solidFill>
+                  <a:schemeClr val="bg1"/>
                 </a:solidFill>
                 <a:latin typeface="Consolas" pitchFamily="34" charset="0"/>
                 <a:ea typeface="Consolas" pitchFamily="34" charset="-122"/>
@@ -20018,7 +20094,11 @@
               </a:rPr>
               <a:t>Групп: 6</a:t>
             </a:r>
-            <a:endParaRPr lang="en-US" dirty="0"/>
+            <a:endParaRPr lang="en-US" sz="2000" dirty="0">
+              <a:solidFill>
+                <a:schemeClr val="bg1"/>
+              </a:solidFill>
+            </a:endParaRPr>
           </a:p>
           <a:p>
             <a:pPr marL="0" indent="0">
@@ -20028,9 +20108,9 @@
               <a:buNone/>
             </a:pPr>
             <a:r>
-              <a:rPr lang="en-US" dirty="0">
-                <a:solidFill>
-                  <a:srgbClr val="4FD1E0"/>
+              <a:rPr lang="en-US" sz="2000" dirty="0">
+                <a:solidFill>
+                  <a:schemeClr val="bg1"/>
                 </a:solidFill>
                 <a:latin typeface="Consolas" pitchFamily="34" charset="0"/>
                 <a:ea typeface="Consolas" pitchFamily="34" charset="-122"/>
@@ -20038,7 +20118,11 @@
               </a:rPr>
               <a:t>Осталось: 1</a:t>
             </a:r>
-            <a:endParaRPr lang="en-US" dirty="0"/>
+            <a:endParaRPr lang="en-US" sz="2000" dirty="0">
+              <a:solidFill>
+                <a:schemeClr val="bg1"/>
+              </a:solidFill>
+            </a:endParaRPr>
           </a:p>
         </p:txBody>
       </p:sp>
@@ -20421,7 +20505,7 @@
               <a:buNone/>
             </a:pPr>
             <a:r>
-              <a:rPr lang="en-US" sz="1400" dirty="0">
+              <a:rPr lang="en-US" sz="2000" dirty="0">
                 <a:solidFill>
                   <a:srgbClr val="4FD1E0"/>
                 </a:solidFill>
@@ -20431,7 +20515,7 @@
               </a:rPr>
               <a:t>minuty = 100</a:t>
             </a:r>
-            <a:endParaRPr lang="en-US" sz="1400" dirty="0"/>
+            <a:endParaRPr lang="en-US" sz="2000" dirty="0"/>
           </a:p>
           <a:p>
             <a:pPr marL="0" indent="0">
@@ -20440,7 +20524,7 @@
               </a:lnSpc>
               <a:buNone/>
             </a:pPr>
-            <a:endParaRPr lang="en-US" sz="1400" dirty="0"/>
+            <a:endParaRPr lang="en-US" sz="2000" dirty="0"/>
           </a:p>
           <a:p>
             <a:pPr marL="0" indent="0">
@@ -20450,7 +20534,7 @@
               <a:buNone/>
             </a:pPr>
             <a:r>
-              <a:rPr lang="en-US" sz="1400" dirty="0">
+              <a:rPr lang="en-US" sz="2000" dirty="0">
                 <a:solidFill>
                   <a:srgbClr val="4FD1E0"/>
                 </a:solidFill>
@@ -20460,7 +20544,7 @@
               </a:rPr>
               <a:t>ch = minuty // 60</a:t>
             </a:r>
-            <a:endParaRPr lang="en-US" sz="1400" dirty="0"/>
+            <a:endParaRPr lang="en-US" sz="2000" dirty="0"/>
           </a:p>
           <a:p>
             <a:pPr marL="0" indent="0">
@@ -20470,7 +20554,7 @@
               <a:buNone/>
             </a:pPr>
             <a:r>
-              <a:rPr lang="en-US" sz="1400" dirty="0">
+              <a:rPr lang="en-US" sz="2000" dirty="0">
                 <a:solidFill>
                   <a:srgbClr val="4FD1E0"/>
                 </a:solidFill>
@@ -20480,7 +20564,7 @@
               </a:rPr>
               <a:t>m = minuty % 60</a:t>
             </a:r>
-            <a:endParaRPr lang="en-US" sz="1400" dirty="0"/>
+            <a:endParaRPr lang="en-US" sz="2000" dirty="0"/>
           </a:p>
           <a:p>
             <a:pPr marL="0" indent="0">
@@ -20489,7 +20573,7 @@
               </a:lnSpc>
               <a:buNone/>
             </a:pPr>
-            <a:endParaRPr lang="en-US" sz="1400" dirty="0"/>
+            <a:endParaRPr lang="en-US" sz="2000" dirty="0"/>
           </a:p>
           <a:p>
             <a:pPr marL="0" indent="0">
@@ -20499,7 +20583,7 @@
               <a:buNone/>
             </a:pPr>
             <a:r>
-              <a:rPr lang="en-US" sz="1400" dirty="0">
+              <a:rPr lang="en-US" sz="2000" dirty="0">
                 <a:solidFill>
                   <a:srgbClr val="4FD1E0"/>
                 </a:solidFill>
@@ -20509,7 +20593,7 @@
               </a:rPr>
               <a:t>print("Часы:", ch)</a:t>
             </a:r>
-            <a:endParaRPr lang="en-US" sz="1400" dirty="0"/>
+            <a:endParaRPr lang="en-US" sz="2000" dirty="0"/>
           </a:p>
           <a:p>
             <a:pPr marL="0" indent="0">
@@ -20519,7 +20603,7 @@
               <a:buNone/>
             </a:pPr>
             <a:r>
-              <a:rPr lang="en-US" sz="1400" dirty="0">
+              <a:rPr lang="en-US" sz="2000" dirty="0">
                 <a:solidFill>
                   <a:srgbClr val="4FD1E0"/>
                 </a:solidFill>
@@ -20529,7 +20613,7 @@
               </a:rPr>
               <a:t>print("Минуты:", m)</a:t>
             </a:r>
-            <a:endParaRPr lang="en-US" sz="1400" dirty="0"/>
+            <a:endParaRPr lang="en-US" sz="2000" dirty="0"/>
           </a:p>
         </p:txBody>
       </p:sp>
@@ -20882,7 +20966,7 @@
             <a:r>
               <a:rPr lang="en-US" sz="1400" dirty="0">
                 <a:solidFill>
-                  <a:srgbClr val="4FD1E0"/>
+                  <a:schemeClr val="bg1"/>
                 </a:solidFill>
                 <a:latin typeface="Consolas" pitchFamily="34" charset="0"/>
                 <a:ea typeface="Consolas" pitchFamily="34" charset="-122"/>
@@ -20890,7 +20974,11 @@
               </a:rPr>
               <a:t>n = 47</a:t>
             </a:r>
-            <a:endParaRPr lang="en-US" sz="1400" dirty="0"/>
+            <a:endParaRPr lang="en-US" sz="1400" dirty="0">
+              <a:solidFill>
+                <a:schemeClr val="bg1"/>
+              </a:solidFill>
+            </a:endParaRPr>
           </a:p>
           <a:p>
             <a:pPr marL="0" indent="0">
@@ -20899,7 +20987,11 @@
               </a:lnSpc>
               <a:buNone/>
             </a:pPr>
-            <a:endParaRPr lang="en-US" sz="1400" dirty="0"/>
+            <a:endParaRPr lang="en-US" sz="1400" dirty="0">
+              <a:solidFill>
+                <a:schemeClr val="bg1"/>
+              </a:solidFill>
+            </a:endParaRPr>
           </a:p>
           <a:p>
             <a:pPr marL="0" indent="0">
@@ -20911,7 +21003,7 @@
             <a:r>
               <a:rPr lang="en-US" sz="1400" dirty="0">
                 <a:solidFill>
-                  <a:srgbClr val="4FD1E0"/>
+                  <a:schemeClr val="bg1"/>
                 </a:solidFill>
                 <a:latin typeface="Consolas" pitchFamily="34" charset="0"/>
                 <a:ea typeface="Consolas" pitchFamily="34" charset="-122"/>
@@ -20919,7 +21011,11 @@
               </a:rPr>
               <a:t>print("Десятки:", n // 10)</a:t>
             </a:r>
-            <a:endParaRPr lang="en-US" sz="1400" dirty="0"/>
+            <a:endParaRPr lang="en-US" sz="1400" dirty="0">
+              <a:solidFill>
+                <a:schemeClr val="bg1"/>
+              </a:solidFill>
+            </a:endParaRPr>
           </a:p>
           <a:p>
             <a:pPr marL="0" indent="0">
@@ -20931,7 +21027,7 @@
             <a:r>
               <a:rPr lang="en-US" sz="1400" dirty="0">
                 <a:solidFill>
-                  <a:srgbClr val="4FD1E0"/>
+                  <a:schemeClr val="bg1"/>
                 </a:solidFill>
                 <a:latin typeface="Consolas" pitchFamily="34" charset="0"/>
                 <a:ea typeface="Consolas" pitchFamily="34" charset="-122"/>
@@ -20939,7 +21035,11 @@
               </a:rPr>
               <a:t>print("Единицы:", n % 10)</a:t>
             </a:r>
-            <a:endParaRPr lang="en-US" sz="1400" dirty="0"/>
+            <a:endParaRPr lang="en-US" sz="1400" dirty="0">
+              <a:solidFill>
+                <a:schemeClr val="bg1"/>
+              </a:solidFill>
+            </a:endParaRPr>
           </a:p>
         </p:txBody>
       </p:sp>
